--- a/generated/Tier 1 Broker Scorecards/Call Patty Insurance Services_Broker_Scorecard.pptx
+++ b/generated/Tier 1 Broker Scorecards/Call Patty Insurance Services_Broker_Scorecard.pptx
@@ -3357,7 +3357,7 @@
                         <a:rPr sz="800">
                           <a:latin typeface="Segoe UI"/>
                         </a:rPr>
-                        <a:t>$2,749,089.87 / $2,442,702.46 / $738,178.54</a:t>
+                        <a:t>$2,749,089.87 / $2,442,816.81 / $738,292.89</a:t>
                       </a:r>
                     </a:p>
                   </a:txBody>
@@ -3394,7 +3394,7 @@
                         <a:rPr sz="900">
                           <a:latin typeface="Segoe UI"/>
                         </a:rPr>
-                        <a:t>Tier 1  |  7.64% / 15.00%</a:t>
+                        <a:t>Tier 1  |  7.79% / 15.00%</a:t>
                       </a:r>
                     </a:p>
                   </a:txBody>
@@ -3690,7 +3690,7 @@
                         <a:rPr sz="900">
                           <a:latin typeface="Segoe UI"/>
                         </a:rPr>
-                        <a:t>Fleet Bound Premium: $352,424.66</a:t>
+                        <a:t>Fleet Bound Premium: $346,976.47</a:t>
                       </a:r>
                     </a:p>
                   </a:txBody>
@@ -3727,7 +3727,7 @@
                         <a:rPr sz="900">
                           <a:latin typeface="Segoe UI"/>
                         </a:rPr>
-                        <a:t>Fleet Book %: 47.7%</a:t>
+                        <a:t>Fleet Book %: 47.0%</a:t>
                       </a:r>
                     </a:p>
                   </a:txBody>
@@ -3766,7 +3766,7 @@
                         <a:rPr sz="900">
                           <a:latin typeface="Segoe UI"/>
                         </a:rPr>
-                        <a:t>Non-Fleet Subs: 394  |  Binds: 25</a:t>
+                        <a:t>Non-Fleet Subs: 399  |  Binds: 26</a:t>
                       </a:r>
                     </a:p>
                   </a:txBody>
@@ -3803,7 +3803,7 @@
                         <a:rPr sz="900">
                           <a:latin typeface="Segoe UI"/>
                         </a:rPr>
-                        <a:t>Non-Fleet Bound Premium: $385,753.88</a:t>
+                        <a:t>Non-Fleet Bound Premium: $391,316.42</a:t>
                       </a:r>
                     </a:p>
                   </a:txBody>
@@ -3840,7 +3840,7 @@
                         <a:rPr sz="900">
                           <a:latin typeface="Segoe UI"/>
                         </a:rPr>
-                        <a:t>Non-Fleet Book %: 52.3%</a:t>
+                        <a:t>Non-Fleet Book %: 53.0%</a:t>
                       </a:r>
                     </a:p>
                   </a:txBody>
@@ -4428,7 +4428,7 @@
                           </a:solidFill>
                           <a:latin typeface="Segoe UI"/>
                         </a:rPr>
-                        <a:t>53</a:t>
+                        <a:t>58</a:t>
                       </a:r>
                     </a:p>
                   </a:txBody>
@@ -4707,7 +4707,7 @@
                           </a:solidFill>
                           <a:latin typeface="Segoe UI"/>
                         </a:rPr>
-                        <a:t>11.3%</a:t>
+                        <a:t>12.1%</a:t>
                       </a:r>
                     </a:p>
                   </a:txBody>
@@ -4983,7 +4983,7 @@
                           </a:solidFill>
                           <a:latin typeface="Segoe UI"/>
                         </a:rPr>
-                        <a:t>6</a:t>
+                        <a:t>7</a:t>
                       </a:r>
                     </a:p>
                   </a:txBody>
@@ -5262,7 +5262,7 @@
                           </a:solidFill>
                           <a:latin typeface="Segoe UI"/>
                         </a:rPr>
-                        <a:t>$142.7K</a:t>
+                        <a:t>$142.8K</a:t>
                       </a:r>
                     </a:p>
                   </a:txBody>

--- a/generated/Tier 1 Broker Scorecards/Call Patty Insurance Services_Broker_Scorecard.pptx
+++ b/generated/Tier 1 Broker Scorecards/Call Patty Insurance Services_Broker_Scorecard.pptx
@@ -3394,7 +3394,7 @@
                         <a:rPr sz="900">
                           <a:latin typeface="Segoe UI"/>
                         </a:rPr>
-                        <a:t>Tier 1  |  7.79% / 15.00%</a:t>
+                        <a:t>Tier 1  |  7.00% / 15.00%</a:t>
                       </a:r>
                     </a:p>
                   </a:txBody>
@@ -3690,7 +3690,7 @@
                         <a:rPr sz="900">
                           <a:latin typeface="Segoe UI"/>
                         </a:rPr>
-                        <a:t>Fleet Bound Premium: $346,976.47</a:t>
+                        <a:t>Fleet Bound Premium: $373,066.99</a:t>
                       </a:r>
                     </a:p>
                   </a:txBody>
@@ -3727,7 +3727,7 @@
                         <a:rPr sz="900">
                           <a:latin typeface="Segoe UI"/>
                         </a:rPr>
-                        <a:t>Fleet Book %: 47.0%</a:t>
+                        <a:t>Fleet Book %: 50.5%</a:t>
                       </a:r>
                     </a:p>
                   </a:txBody>
@@ -3766,7 +3766,7 @@
                         <a:rPr sz="900">
                           <a:latin typeface="Segoe UI"/>
                         </a:rPr>
-                        <a:t>Non-Fleet Subs: 399  |  Binds: 26</a:t>
+                        <a:t>Non-Fleet Subs: 402  |  Binds: 23</a:t>
                       </a:r>
                     </a:p>
                   </a:txBody>
@@ -3803,7 +3803,7 @@
                         <a:rPr sz="900">
                           <a:latin typeface="Segoe UI"/>
                         </a:rPr>
-                        <a:t>Non-Fleet Bound Premium: $391,316.42</a:t>
+                        <a:t>Non-Fleet Bound Premium: $365,225.90</a:t>
                       </a:r>
                     </a:p>
                   </a:txBody>
@@ -3840,7 +3840,7 @@
                         <a:rPr sz="900">
                           <a:latin typeface="Segoe UI"/>
                         </a:rPr>
-                        <a:t>Non-Fleet Book %: 53.0%</a:t>
+                        <a:t>Non-Fleet Book %: 49.5%</a:t>
                       </a:r>
                     </a:p>
                   </a:txBody>
@@ -4428,7 +4428,7 @@
                           </a:solidFill>
                           <a:latin typeface="Segoe UI"/>
                         </a:rPr>
-                        <a:t>58</a:t>
+                        <a:t>64</a:t>
                       </a:r>
                     </a:p>
                   </a:txBody>
@@ -4581,7 +4581,7 @@
                         <a:rPr sz="800">
                           <a:latin typeface="Segoe UI"/>
                         </a:rPr>
-                        <a:t>12.8%</a:t>
+                        <a:t>13.4%</a:t>
                       </a:r>
                     </a:p>
                   </a:txBody>
@@ -4664,7 +4664,7 @@
                         <a:rPr sz="800">
                           <a:latin typeface="Segoe UI"/>
                         </a:rPr>
-                        <a:t>13.2%</a:t>
+                        <a:t>12.5%</a:t>
                       </a:r>
                     </a:p>
                   </a:txBody>
@@ -4707,7 +4707,7 @@
                           </a:solidFill>
                           <a:latin typeface="Segoe UI"/>
                         </a:rPr>
-                        <a:t>12.1%</a:t>
+                        <a:t>9.4%</a:t>
                       </a:r>
                     </a:p>
                   </a:txBody>
@@ -4747,7 +4747,7 @@
                         <a:rPr sz="800">
                           <a:latin typeface="Segoe UI"/>
                         </a:rPr>
-                        <a:t>13.2%</a:t>
+                        <a:t>12.4%</a:t>
                       </a:r>
                     </a:p>
                   </a:txBody>
@@ -4866,7 +4866,7 @@
                         <a:rPr sz="800">
                           <a:latin typeface="Segoe UI"/>
                         </a:rPr>
-                        <a:t>19</a:t>
+                        <a:t>20</a:t>
                       </a:r>
                     </a:p>
                   </a:txBody>
@@ -4943,7 +4943,7 @@
                         <a:rPr sz="800">
                           <a:latin typeface="Segoe UI"/>
                         </a:rPr>
-                        <a:t>19</a:t>
+                        <a:t>18</a:t>
                       </a:r>
                     </a:p>
                   </a:txBody>
@@ -4983,7 +4983,7 @@
                           </a:solidFill>
                           <a:latin typeface="Segoe UI"/>
                         </a:rPr>
-                        <a:t>7</a:t>
+                        <a:t>6</a:t>
                       </a:r>
                     </a:p>
                   </a:txBody>
@@ -5020,7 +5020,7 @@
                         <a:rPr sz="800">
                           <a:latin typeface="Segoe UI"/>
                         </a:rPr>
-                        <a:t>17</a:t>
+                        <a:t>16</a:t>
                       </a:r>
                     </a:p>
                   </a:txBody>

--- a/generated/Tier 1 Broker Scorecards/Call Patty Insurance Services_Broker_Scorecard.pptx
+++ b/generated/Tier 1 Broker Scorecards/Call Patty Insurance Services_Broker_Scorecard.pptx
@@ -3357,7 +3357,7 @@
                         <a:rPr sz="800">
                           <a:latin typeface="Segoe UI"/>
                         </a:rPr>
-                        <a:t>$2,749,089.87 / $2,442,816.81 / $738,292.89</a:t>
+                        <a:t>$2,749,089.87 / $2,443,174.20 / $738,650.28</a:t>
                       </a:r>
                     </a:p>
                   </a:txBody>
@@ -3394,7 +3394,7 @@
                         <a:rPr sz="900">
                           <a:latin typeface="Segoe UI"/>
                         </a:rPr>
-                        <a:t>Tier 1  |  7.00% / 15.00%</a:t>
+                        <a:t>Tier 1  |  6.95% / 15.00%</a:t>
                       </a:r>
                     </a:p>
                   </a:txBody>
@@ -3690,7 +3690,7 @@
                         <a:rPr sz="900">
                           <a:latin typeface="Segoe UI"/>
                         </a:rPr>
-                        <a:t>Fleet Bound Premium: $373,066.99</a:t>
+                        <a:t>Fleet Bound Premium: $373,247.58</a:t>
                       </a:r>
                     </a:p>
                   </a:txBody>
@@ -3766,7 +3766,7 @@
                         <a:rPr sz="900">
                           <a:latin typeface="Segoe UI"/>
                         </a:rPr>
-                        <a:t>Non-Fleet Subs: 402  |  Binds: 23</a:t>
+                        <a:t>Non-Fleet Subs: 405  |  Binds: 23</a:t>
                       </a:r>
                     </a:p>
                   </a:txBody>
@@ -3803,7 +3803,7 @@
                         <a:rPr sz="900">
                           <a:latin typeface="Segoe UI"/>
                         </a:rPr>
-                        <a:t>Non-Fleet Bound Premium: $365,225.90</a:t>
+                        <a:t>Non-Fleet Bound Premium: $365,402.70</a:t>
                       </a:r>
                     </a:p>
                   </a:txBody>
@@ -4428,7 +4428,7 @@
                           </a:solidFill>
                           <a:latin typeface="Segoe UI"/>
                         </a:rPr>
-                        <a:t>64</a:t>
+                        <a:t>67</a:t>
                       </a:r>
                     </a:p>
                   </a:txBody>
@@ -4707,7 +4707,7 @@
                           </a:solidFill>
                           <a:latin typeface="Segoe UI"/>
                         </a:rPr>
-                        <a:t>9.4%</a:t>
+                        <a:t>9.0%</a:t>
                       </a:r>
                     </a:p>
                   </a:txBody>
@@ -4747,7 +4747,7 @@
                         <a:rPr sz="800">
                           <a:latin typeface="Segoe UI"/>
                         </a:rPr>
-                        <a:t>12.4%</a:t>
+                        <a:t>13.2%</a:t>
                       </a:r>
                     </a:p>
                   </a:txBody>
@@ -5020,7 +5020,7 @@
                         <a:rPr sz="800">
                           <a:latin typeface="Segoe UI"/>
                         </a:rPr>
-                        <a:t>16</a:t>
+                        <a:t>17</a:t>
                       </a:r>
                     </a:p>
                   </a:txBody>
@@ -5262,7 +5262,7 @@
                           </a:solidFill>
                           <a:latin typeface="Segoe UI"/>
                         </a:rPr>
-                        <a:t>$142.8K</a:t>
+                        <a:t>$143.1K</a:t>
                       </a:r>
                     </a:p>
                   </a:txBody>

--- a/generated/Tier 1 Broker Scorecards/Call Patty Insurance Services_Broker_Scorecard.pptx
+++ b/generated/Tier 1 Broker Scorecards/Call Patty Insurance Services_Broker_Scorecard.pptx
@@ -3357,7 +3357,7 @@
                         <a:rPr sz="800">
                           <a:latin typeface="Segoe UI"/>
                         </a:rPr>
-                        <a:t>$2,749,089.87 / $2,443,174.20 / $738,650.28</a:t>
+                        <a:t>$2,749,089.87 / $2,445,670.33 / $741,146.41</a:t>
                       </a:r>
                     </a:p>
                   </a:txBody>
@@ -3394,7 +3394,7 @@
                         <a:rPr sz="900">
                           <a:latin typeface="Segoe UI"/>
                         </a:rPr>
-                        <a:t>Tier 1  |  6.95% / 15.00%</a:t>
+                        <a:t>Tier 1  |  7.42% / 15.00%</a:t>
                       </a:r>
                     </a:p>
                   </a:txBody>
@@ -3431,7 +3431,7 @@
                         <a:rPr sz="900">
                           <a:latin typeface="Segoe UI"/>
                         </a:rPr>
-                        <a:t>$3,848,725.82  (19.2% achieved)</a:t>
+                        <a:t>$3,848,725.82  (19.3% achieved)</a:t>
                       </a:r>
                     </a:p>
                   </a:txBody>
@@ -3653,7 +3653,7 @@
                         <a:rPr sz="900">
                           <a:latin typeface="Segoe UI"/>
                         </a:rPr>
-                        <a:t>Fleet Subs: 12  |  Binds: 6</a:t>
+                        <a:t>Fleet Subs: 12  |  Binds: 7</a:t>
                       </a:r>
                     </a:p>
                   </a:txBody>
@@ -3690,7 +3690,7 @@
                         <a:rPr sz="900">
                           <a:latin typeface="Segoe UI"/>
                         </a:rPr>
-                        <a:t>Fleet Bound Premium: $373,247.58</a:t>
+                        <a:t>Fleet Bound Premium: $396,729.66</a:t>
                       </a:r>
                     </a:p>
                   </a:txBody>
@@ -3727,7 +3727,7 @@
                         <a:rPr sz="900">
                           <a:latin typeface="Segoe UI"/>
                         </a:rPr>
-                        <a:t>Fleet Book %: 50.5%</a:t>
+                        <a:t>Fleet Book %: 53.5%</a:t>
                       </a:r>
                     </a:p>
                   </a:txBody>
@@ -3766,7 +3766,7 @@
                         <a:rPr sz="900">
                           <a:latin typeface="Segoe UI"/>
                         </a:rPr>
-                        <a:t>Non-Fleet Subs: 405  |  Binds: 23</a:t>
+                        <a:t>Non-Fleet Subs: 406  |  Binds: 24</a:t>
                       </a:r>
                     </a:p>
                   </a:txBody>
@@ -3803,7 +3803,7 @@
                         <a:rPr sz="900">
                           <a:latin typeface="Segoe UI"/>
                         </a:rPr>
-                        <a:t>Non-Fleet Bound Premium: $365,402.70</a:t>
+                        <a:t>Non-Fleet Bound Premium: $344,416.75</a:t>
                       </a:r>
                     </a:p>
                   </a:txBody>
@@ -3840,7 +3840,7 @@
                         <a:rPr sz="900">
                           <a:latin typeface="Segoe UI"/>
                         </a:rPr>
-                        <a:t>Non-Fleet Book %: 49.5%</a:t>
+                        <a:t>Non-Fleet Book %: 46.5%</a:t>
                       </a:r>
                     </a:p>
                   </a:txBody>
@@ -4428,7 +4428,7 @@
                           </a:solidFill>
                           <a:latin typeface="Segoe UI"/>
                         </a:rPr>
-                        <a:t>67</a:t>
+                        <a:t>68</a:t>
                       </a:r>
                     </a:p>
                   </a:txBody>
@@ -4581,7 +4581,7 @@
                         <a:rPr sz="800">
                           <a:latin typeface="Segoe UI"/>
                         </a:rPr>
-                        <a:t>13.4%</a:t>
+                        <a:t>12.8%</a:t>
                       </a:r>
                     </a:p>
                   </a:txBody>
@@ -4624,7 +4624,7 @@
                           </a:solidFill>
                           <a:latin typeface="Segoe UI"/>
                         </a:rPr>
-                        <a:t>10.2%</a:t>
+                        <a:t>11.1%</a:t>
                       </a:r>
                     </a:p>
                   </a:txBody>
@@ -4707,7 +4707,7 @@
                           </a:solidFill>
                           <a:latin typeface="Segoe UI"/>
                         </a:rPr>
-                        <a:t>9.0%</a:t>
+                        <a:t>10.3%</a:t>
                       </a:r>
                     </a:p>
                   </a:txBody>
@@ -4747,7 +4747,7 @@
                         <a:rPr sz="800">
                           <a:latin typeface="Segoe UI"/>
                         </a:rPr>
-                        <a:t>13.2%</a:t>
+                        <a:t>12.4%</a:t>
                       </a:r>
                     </a:p>
                   </a:txBody>
@@ -4866,7 +4866,7 @@
                         <a:rPr sz="800">
                           <a:latin typeface="Segoe UI"/>
                         </a:rPr>
-                        <a:t>20</a:t>
+                        <a:t>19</a:t>
                       </a:r>
                     </a:p>
                   </a:txBody>
@@ -4906,7 +4906,7 @@
                           </a:solidFill>
                           <a:latin typeface="Segoe UI"/>
                         </a:rPr>
-                        <a:t>11</a:t>
+                        <a:t>12</a:t>
                       </a:r>
                     </a:p>
                   </a:txBody>
@@ -4983,7 +4983,7 @@
                           </a:solidFill>
                           <a:latin typeface="Segoe UI"/>
                         </a:rPr>
-                        <a:t>6</a:t>
+                        <a:t>7</a:t>
                       </a:r>
                     </a:p>
                   </a:txBody>
@@ -5020,7 +5020,7 @@
                         <a:rPr sz="800">
                           <a:latin typeface="Segoe UI"/>
                         </a:rPr>
-                        <a:t>17</a:t>
+                        <a:t>16</a:t>
                       </a:r>
                     </a:p>
                   </a:txBody>
@@ -5262,7 +5262,7 @@
                           </a:solidFill>
                           <a:latin typeface="Segoe UI"/>
                         </a:rPr>
-                        <a:t>$143.1K</a:t>
+                        <a:t>$145.6K</a:t>
                       </a:r>
                     </a:p>
                   </a:txBody>
@@ -5339,10 +5339,13 @@
                     <a:p>
                       <a:pPr algn="ctr"/>
                       <a:r>
-                        <a:rPr sz="800">
+                        <a:rPr sz="800" b="1">
+                          <a:solidFill>
+                            <a:srgbClr val="DC2626"/>
+                          </a:solidFill>
                           <a:latin typeface="Segoe UI"/>
                         </a:rPr>
-                        <a:t/>
+                        <a:t>$33.1K</a:t>
                       </a:r>
                     </a:p>
                   </a:txBody>

--- a/generated/Tier 1 Broker Scorecards/Call Patty Insurance Services_Broker_Scorecard.pptx
+++ b/generated/Tier 1 Broker Scorecards/Call Patty Insurance Services_Broker_Scorecard.pptx
@@ -3357,7 +3357,7 @@
                         <a:rPr sz="800">
                           <a:latin typeface="Segoe UI"/>
                         </a:rPr>
-                        <a:t>$2,749,089.87 / $2,445,670.33 / $741,146.41</a:t>
+                        <a:t>$2,749,089.87 / $2,446,466.46 / $741,942.54</a:t>
                       </a:r>
                     </a:p>
                   </a:txBody>
@@ -3394,7 +3394,7 @@
                         <a:rPr sz="900">
                           <a:latin typeface="Segoe UI"/>
                         </a:rPr>
-                        <a:t>Tier 1  |  7.42% / 15.00%</a:t>
+                        <a:t>Tier 1  |  7.36% / 15.00%</a:t>
                       </a:r>
                     </a:p>
                   </a:txBody>
@@ -3653,7 +3653,7 @@
                         <a:rPr sz="900">
                           <a:latin typeface="Segoe UI"/>
                         </a:rPr>
-                        <a:t>Fleet Subs: 12  |  Binds: 7</a:t>
+                        <a:t>Fleet Subs: 13  |  Binds: 7</a:t>
                       </a:r>
                     </a:p>
                   </a:txBody>
@@ -3690,7 +3690,7 @@
                         <a:rPr sz="900">
                           <a:latin typeface="Segoe UI"/>
                         </a:rPr>
-                        <a:t>Fleet Bound Premium: $396,729.66</a:t>
+                        <a:t>Fleet Bound Premium: $398,047.51</a:t>
                       </a:r>
                     </a:p>
                   </a:txBody>
@@ -3727,7 +3727,7 @@
                         <a:rPr sz="900">
                           <a:latin typeface="Segoe UI"/>
                         </a:rPr>
-                        <a:t>Fleet Book %: 53.5%</a:t>
+                        <a:t>Fleet Book %: 53.6%</a:t>
                       </a:r>
                     </a:p>
                   </a:txBody>
@@ -3766,7 +3766,7 @@
                         <a:rPr sz="900">
                           <a:latin typeface="Segoe UI"/>
                         </a:rPr>
-                        <a:t>Non-Fleet Subs: 406  |  Binds: 24</a:t>
+                        <a:t>Non-Fleet Subs: 408  |  Binds: 24</a:t>
                       </a:r>
                     </a:p>
                   </a:txBody>
@@ -3803,7 +3803,7 @@
                         <a:rPr sz="900">
                           <a:latin typeface="Segoe UI"/>
                         </a:rPr>
-                        <a:t>Non-Fleet Bound Premium: $344,416.75</a:t>
+                        <a:t>Non-Fleet Bound Premium: $343,895.03</a:t>
                       </a:r>
                     </a:p>
                   </a:txBody>
@@ -3840,7 +3840,7 @@
                         <a:rPr sz="900">
                           <a:latin typeface="Segoe UI"/>
                         </a:rPr>
-                        <a:t>Non-Fleet Book %: 46.5%</a:t>
+                        <a:t>Non-Fleet Book %: 46.4%</a:t>
                       </a:r>
                     </a:p>
                   </a:txBody>
@@ -4428,7 +4428,7 @@
                           </a:solidFill>
                           <a:latin typeface="Segoe UI"/>
                         </a:rPr>
-                        <a:t>68</a:t>
+                        <a:t>71</a:t>
                       </a:r>
                     </a:p>
                   </a:txBody>
@@ -4581,7 +4581,7 @@
                         <a:rPr sz="800">
                           <a:latin typeface="Segoe UI"/>
                         </a:rPr>
-                        <a:t>12.8%</a:t>
+                        <a:t>13.4%</a:t>
                       </a:r>
                     </a:p>
                   </a:txBody>
@@ -4664,7 +4664,7 @@
                         <a:rPr sz="800">
                           <a:latin typeface="Segoe UI"/>
                         </a:rPr>
-                        <a:t>12.5%</a:t>
+                        <a:t>13.2%</a:t>
                       </a:r>
                     </a:p>
                   </a:txBody>
@@ -4707,7 +4707,7 @@
                           </a:solidFill>
                           <a:latin typeface="Segoe UI"/>
                         </a:rPr>
-                        <a:t>10.3%</a:t>
+                        <a:t>9.9%</a:t>
                       </a:r>
                     </a:p>
                   </a:txBody>
@@ -4747,7 +4747,7 @@
                         <a:rPr sz="800">
                           <a:latin typeface="Segoe UI"/>
                         </a:rPr>
-                        <a:t>12.4%</a:t>
+                        <a:t>14.0%</a:t>
                       </a:r>
                     </a:p>
                   </a:txBody>
@@ -4866,7 +4866,7 @@
                         <a:rPr sz="800">
                           <a:latin typeface="Segoe UI"/>
                         </a:rPr>
-                        <a:t>19</a:t>
+                        <a:t>20</a:t>
                       </a:r>
                     </a:p>
                   </a:txBody>
@@ -4943,7 +4943,7 @@
                         <a:rPr sz="800">
                           <a:latin typeface="Segoe UI"/>
                         </a:rPr>
-                        <a:t>18</a:t>
+                        <a:t>19</a:t>
                       </a:r>
                     </a:p>
                   </a:txBody>
@@ -5020,7 +5020,7 @@
                         <a:rPr sz="800">
                           <a:latin typeface="Segoe UI"/>
                         </a:rPr>
-                        <a:t>16</a:t>
+                        <a:t>18</a:t>
                       </a:r>
                     </a:p>
                   </a:txBody>
@@ -5262,7 +5262,7 @@
                           </a:solidFill>
                           <a:latin typeface="Segoe UI"/>
                         </a:rPr>
-                        <a:t>$145.6K</a:t>
+                        <a:t>$146.4K</a:t>
                       </a:r>
                     </a:p>
                   </a:txBody>

--- a/generated/Tier 1 Broker Scorecards/Call Patty Insurance Services_Broker_Scorecard.pptx
+++ b/generated/Tier 1 Broker Scorecards/Call Patty Insurance Services_Broker_Scorecard.pptx
@@ -4581,7 +4581,7 @@
                         <a:rPr sz="800">
                           <a:latin typeface="Segoe UI"/>
                         </a:rPr>
-                        <a:t>13.4%</a:t>
+                        <a:t>12.8%</a:t>
                       </a:r>
                     </a:p>
                   </a:txBody>
@@ -4747,7 +4747,7 @@
                         <a:rPr sz="800">
                           <a:latin typeface="Segoe UI"/>
                         </a:rPr>
-                        <a:t>14.0%</a:t>
+                        <a:t>12.4%</a:t>
                       </a:r>
                     </a:p>
                   </a:txBody>
@@ -4866,7 +4866,7 @@
                         <a:rPr sz="800">
                           <a:latin typeface="Segoe UI"/>
                         </a:rPr>
-                        <a:t>20</a:t>
+                        <a:t>19</a:t>
                       </a:r>
                     </a:p>
                   </a:txBody>
@@ -5020,7 +5020,7 @@
                         <a:rPr sz="800">
                           <a:latin typeface="Segoe UI"/>
                         </a:rPr>
-                        <a:t>18</a:t>
+                        <a:t>16</a:t>
                       </a:r>
                     </a:p>
                   </a:txBody>

--- a/generated/Tier 1 Broker Scorecards/Call Patty Insurance Services_Broker_Scorecard.pptx
+++ b/generated/Tier 1 Broker Scorecards/Call Patty Insurance Services_Broker_Scorecard.pptx
@@ -3394,7 +3394,7 @@
                         <a:rPr sz="900">
                           <a:latin typeface="Segoe UI"/>
                         </a:rPr>
-                        <a:t>Tier 1  |  7.36% / 15.00%</a:t>
+                        <a:t>Tier 1  |  7.35% / 15.00%</a:t>
                       </a:r>
                     </a:p>
                   </a:txBody>
@@ -3766,7 +3766,7 @@
                         <a:rPr sz="900">
                           <a:latin typeface="Segoe UI"/>
                         </a:rPr>
-                        <a:t>Non-Fleet Subs: 408  |  Binds: 24</a:t>
+                        <a:t>Non-Fleet Subs: 409  |  Binds: 24</a:t>
                       </a:r>
                     </a:p>
                   </a:txBody>
@@ -4428,7 +4428,7 @@
                           </a:solidFill>
                           <a:latin typeface="Segoe UI"/>
                         </a:rPr>
-                        <a:t>71</a:t>
+                        <a:t>72</a:t>
                       </a:r>
                     </a:p>
                   </a:txBody>
@@ -4581,7 +4581,7 @@
                         <a:rPr sz="800">
                           <a:latin typeface="Segoe UI"/>
                         </a:rPr>
-                        <a:t>12.8%</a:t>
+                        <a:t>13.4%</a:t>
                       </a:r>
                     </a:p>
                   </a:txBody>
@@ -4664,7 +4664,7 @@
                         <a:rPr sz="800">
                           <a:latin typeface="Segoe UI"/>
                         </a:rPr>
-                        <a:t>13.2%</a:t>
+                        <a:t>12.5%</a:t>
                       </a:r>
                     </a:p>
                   </a:txBody>
@@ -4707,7 +4707,7 @@
                           </a:solidFill>
                           <a:latin typeface="Segoe UI"/>
                         </a:rPr>
-                        <a:t>9.9%</a:t>
+                        <a:t>9.7%</a:t>
                       </a:r>
                     </a:p>
                   </a:txBody>
@@ -4747,7 +4747,7 @@
                         <a:rPr sz="800">
                           <a:latin typeface="Segoe UI"/>
                         </a:rPr>
-                        <a:t>12.4%</a:t>
+                        <a:t>13.2%</a:t>
                       </a:r>
                     </a:p>
                   </a:txBody>
@@ -4866,7 +4866,7 @@
                         <a:rPr sz="800">
                           <a:latin typeface="Segoe UI"/>
                         </a:rPr>
-                        <a:t>19</a:t>
+                        <a:t>20</a:t>
                       </a:r>
                     </a:p>
                   </a:txBody>
@@ -4943,7 +4943,7 @@
                         <a:rPr sz="800">
                           <a:latin typeface="Segoe UI"/>
                         </a:rPr>
-                        <a:t>19</a:t>
+                        <a:t>18</a:t>
                       </a:r>
                     </a:p>
                   </a:txBody>
@@ -5020,7 +5020,7 @@
                         <a:rPr sz="800">
                           <a:latin typeface="Segoe UI"/>
                         </a:rPr>
-                        <a:t>16</a:t>
+                        <a:t>17</a:t>
                       </a:r>
                     </a:p>
                   </a:txBody>

--- a/generated/Tier 1 Broker Scorecards/Call Patty Insurance Services_Broker_Scorecard.pptx
+++ b/generated/Tier 1 Broker Scorecards/Call Patty Insurance Services_Broker_Scorecard.pptx
@@ -3394,7 +3394,7 @@
                         <a:rPr sz="900">
                           <a:latin typeface="Segoe UI"/>
                         </a:rPr>
-                        <a:t>Tier 1  |  7.35% / 15.00%</a:t>
+                        <a:t>Tier 1  |  7.33% / 15.00%</a:t>
                       </a:r>
                     </a:p>
                   </a:txBody>
@@ -3766,7 +3766,7 @@
                         <a:rPr sz="900">
                           <a:latin typeface="Segoe UI"/>
                         </a:rPr>
-                        <a:t>Non-Fleet Subs: 409  |  Binds: 24</a:t>
+                        <a:t>Non-Fleet Subs: 410  |  Binds: 24</a:t>
                       </a:r>
                     </a:p>
                   </a:txBody>
@@ -4428,7 +4428,7 @@
                           </a:solidFill>
                           <a:latin typeface="Segoe UI"/>
                         </a:rPr>
-                        <a:t>72</a:t>
+                        <a:t>73</a:t>
                       </a:r>
                     </a:p>
                   </a:txBody>
@@ -4664,7 +4664,7 @@
                         <a:rPr sz="800">
                           <a:latin typeface="Segoe UI"/>
                         </a:rPr>
-                        <a:t>12.5%</a:t>
+                        <a:t>13.2%</a:t>
                       </a:r>
                     </a:p>
                   </a:txBody>
@@ -4707,7 +4707,7 @@
                           </a:solidFill>
                           <a:latin typeface="Segoe UI"/>
                         </a:rPr>
-                        <a:t>9.7%</a:t>
+                        <a:t>9.6%</a:t>
                       </a:r>
                     </a:p>
                   </a:txBody>
@@ -4943,7 +4943,7 @@
                         <a:rPr sz="800">
                           <a:latin typeface="Segoe UI"/>
                         </a:rPr>
-                        <a:t>18</a:t>
+                        <a:t>19</a:t>
                       </a:r>
                     </a:p>
                   </a:txBody>

--- a/generated/Tier 1 Broker Scorecards/Call Patty Insurance Services_Broker_Scorecard.pptx
+++ b/generated/Tier 1 Broker Scorecards/Call Patty Insurance Services_Broker_Scorecard.pptx
@@ -3357,7 +3357,7 @@
                         <a:rPr sz="800">
                           <a:latin typeface="Segoe UI"/>
                         </a:rPr>
-                        <a:t>$2,749,089.87 / $2,446,466.46 / $741,942.54</a:t>
+                        <a:t>$2,749,089.87 / $2,442,359.57 / $737,835.65</a:t>
                       </a:r>
                     </a:p>
                   </a:txBody>
@@ -3394,7 +3394,7 @@
                         <a:rPr sz="900">
                           <a:latin typeface="Segoe UI"/>
                         </a:rPr>
-                        <a:t>Tier 1  |  7.33% / 15.00%</a:t>
+                        <a:t>Tier 1  |  7.94% / 15.00%</a:t>
                       </a:r>
                     </a:p>
                   </a:txBody>
@@ -3431,7 +3431,7 @@
                         <a:rPr sz="900">
                           <a:latin typeface="Segoe UI"/>
                         </a:rPr>
-                        <a:t>$3,848,725.82  (19.3% achieved)</a:t>
+                        <a:t>$3,848,725.82  (19.2% achieved)</a:t>
                       </a:r>
                     </a:p>
                   </a:txBody>
@@ -3690,7 +3690,7 @@
                         <a:rPr sz="900">
                           <a:latin typeface="Segoe UI"/>
                         </a:rPr>
-                        <a:t>Fleet Bound Premium: $398,047.51</a:t>
+                        <a:t>Fleet Bound Premium: $372,561.43</a:t>
                       </a:r>
                     </a:p>
                   </a:txBody>
@@ -3727,7 +3727,7 @@
                         <a:rPr sz="900">
                           <a:latin typeface="Segoe UI"/>
                         </a:rPr>
-                        <a:t>Fleet Book %: 53.6%</a:t>
+                        <a:t>Fleet Book %: 50.5%</a:t>
                       </a:r>
                     </a:p>
                   </a:txBody>
@@ -3766,7 +3766,7 @@
                         <a:rPr sz="900">
                           <a:latin typeface="Segoe UI"/>
                         </a:rPr>
-                        <a:t>Non-Fleet Subs: 410  |  Binds: 24</a:t>
+                        <a:t>Non-Fleet Subs: 415  |  Binds: 27</a:t>
                       </a:r>
                     </a:p>
                   </a:txBody>
@@ -3803,7 +3803,7 @@
                         <a:rPr sz="900">
                           <a:latin typeface="Segoe UI"/>
                         </a:rPr>
-                        <a:t>Non-Fleet Bound Premium: $343,895.03</a:t>
+                        <a:t>Non-Fleet Bound Premium: $365,274.22</a:t>
                       </a:r>
                     </a:p>
                   </a:txBody>
@@ -3840,7 +3840,7 @@
                         <a:rPr sz="900">
                           <a:latin typeface="Segoe UI"/>
                         </a:rPr>
-                        <a:t>Non-Fleet Book %: 46.4%</a:t>
+                        <a:t>Non-Fleet Book %: 49.5%</a:t>
                       </a:r>
                     </a:p>
                   </a:txBody>
@@ -4428,7 +4428,7 @@
                           </a:solidFill>
                           <a:latin typeface="Segoe UI"/>
                         </a:rPr>
-                        <a:t>73</a:t>
+                        <a:t>78</a:t>
                       </a:r>
                     </a:p>
                   </a:txBody>
@@ -4581,7 +4581,7 @@
                         <a:rPr sz="800">
                           <a:latin typeface="Segoe UI"/>
                         </a:rPr>
-                        <a:t>13.4%</a:t>
+                        <a:t>12.8%</a:t>
                       </a:r>
                     </a:p>
                   </a:txBody>
@@ -4707,7 +4707,7 @@
                           </a:solidFill>
                           <a:latin typeface="Segoe UI"/>
                         </a:rPr>
-                        <a:t>9.6%</a:t>
+                        <a:t>12.8%</a:t>
                       </a:r>
                     </a:p>
                   </a:txBody>
@@ -4747,7 +4747,7 @@
                         <a:rPr sz="800">
                           <a:latin typeface="Segoe UI"/>
                         </a:rPr>
-                        <a:t>13.2%</a:t>
+                        <a:t>14.0%</a:t>
                       </a:r>
                     </a:p>
                   </a:txBody>
@@ -4866,7 +4866,7 @@
                         <a:rPr sz="800">
                           <a:latin typeface="Segoe UI"/>
                         </a:rPr>
-                        <a:t>20</a:t>
+                        <a:t>19</a:t>
                       </a:r>
                     </a:p>
                   </a:txBody>
@@ -4983,7 +4983,7 @@
                           </a:solidFill>
                           <a:latin typeface="Segoe UI"/>
                         </a:rPr>
-                        <a:t>7</a:t>
+                        <a:t>10</a:t>
                       </a:r>
                     </a:p>
                   </a:txBody>
@@ -5020,7 +5020,7 @@
                         <a:rPr sz="800">
                           <a:latin typeface="Segoe UI"/>
                         </a:rPr>
-                        <a:t>17</a:t>
+                        <a:t>18</a:t>
                       </a:r>
                     </a:p>
                   </a:txBody>
@@ -5262,7 +5262,7 @@
                           </a:solidFill>
                           <a:latin typeface="Segoe UI"/>
                         </a:rPr>
-                        <a:t>$146.4K</a:t>
+                        <a:t>$142.3K</a:t>
                       </a:r>
                     </a:p>
                   </a:txBody>

--- a/generated/Tier 1 Broker Scorecards/Call Patty Insurance Services_Broker_Scorecard.pptx
+++ b/generated/Tier 1 Broker Scorecards/Call Patty Insurance Services_Broker_Scorecard.pptx
@@ -3394,7 +3394,7 @@
                         <a:rPr sz="900">
                           <a:latin typeface="Segoe UI"/>
                         </a:rPr>
-                        <a:t>Tier 1  |  7.94% / 15.00%</a:t>
+                        <a:t>Tier 1  |  7.85% / 15.00%</a:t>
                       </a:r>
                     </a:p>
                   </a:txBody>
@@ -3653,7 +3653,7 @@
                         <a:rPr sz="900">
                           <a:latin typeface="Segoe UI"/>
                         </a:rPr>
-                        <a:t>Fleet Subs: 13  |  Binds: 7</a:t>
+                        <a:t>Fleet Subs: 13  |  Binds: 6</a:t>
                       </a:r>
                     </a:p>
                   </a:txBody>
@@ -3690,7 +3690,7 @@
                         <a:rPr sz="900">
                           <a:latin typeface="Segoe UI"/>
                         </a:rPr>
-                        <a:t>Fleet Bound Premium: $372,561.43</a:t>
+                        <a:t>Fleet Bound Premium: $341,743.64</a:t>
                       </a:r>
                     </a:p>
                   </a:txBody>
@@ -3727,7 +3727,7 @@
                         <a:rPr sz="900">
                           <a:latin typeface="Segoe UI"/>
                         </a:rPr>
-                        <a:t>Fleet Book %: 50.5%</a:t>
+                        <a:t>Fleet Book %: 46.3%</a:t>
                       </a:r>
                     </a:p>
                   </a:txBody>
@@ -3766,7 +3766,7 @@
                         <a:rPr sz="900">
                           <a:latin typeface="Segoe UI"/>
                         </a:rPr>
-                        <a:t>Non-Fleet Subs: 415  |  Binds: 27</a:t>
+                        <a:t>Non-Fleet Subs: 420  |  Binds: 28</a:t>
                       </a:r>
                     </a:p>
                   </a:txBody>
@@ -3803,7 +3803,7 @@
                         <a:rPr sz="900">
                           <a:latin typeface="Segoe UI"/>
                         </a:rPr>
-                        <a:t>Non-Fleet Bound Premium: $365,274.22</a:t>
+                        <a:t>Non-Fleet Bound Premium: $396,092.01</a:t>
                       </a:r>
                     </a:p>
                   </a:txBody>
@@ -3840,7 +3840,7 @@
                         <a:rPr sz="900">
                           <a:latin typeface="Segoe UI"/>
                         </a:rPr>
-                        <a:t>Non-Fleet Book %: 49.5%</a:t>
+                        <a:t>Non-Fleet Book %: 53.7%</a:t>
                       </a:r>
                     </a:p>
                   </a:txBody>
@@ -4428,7 +4428,7 @@
                           </a:solidFill>
                           <a:latin typeface="Segoe UI"/>
                         </a:rPr>
-                        <a:t>78</a:t>
+                        <a:t>84</a:t>
                       </a:r>
                     </a:p>
                   </a:txBody>
@@ -4624,7 +4624,90 @@
                           </a:solidFill>
                           <a:latin typeface="Segoe UI"/>
                         </a:rPr>
-                        <a:t>11.1%</a:t>
+                        <a:t>12.0%</a:t>
+                      </a:r>
+                    </a:p>
+                  </a:txBody>
+                  <a:tcPr marL="114300" marR="91425" marT="45700" marB="45700">
+                    <a:solidFill>
+                      <a:srgbClr val="F5F3FF"/>
+                    </a:solidFill>
+                    <a:lnL w="6350" cap="flat" cmpd="sng">
+                      <a:solidFill>
+                        <a:srgbClr val="E5E7EB"/>
+                      </a:solidFill>
+                    </a:lnL>
+                    <a:lnR w="6350" cap="flat" cmpd="sng">
+                      <a:solidFill>
+                        <a:srgbClr val="E5E7EB"/>
+                      </a:solidFill>
+                    </a:lnR>
+                    <a:lnT w="6350" cap="flat" cmpd="sng">
+                      <a:solidFill>
+                        <a:srgbClr val="E5E7EB"/>
+                      </a:solidFill>
+                    </a:lnT>
+                    <a:lnB w="6350" cap="flat" cmpd="sng">
+                      <a:solidFill>
+                        <a:srgbClr val="E5E7EB"/>
+                      </a:solidFill>
+                    </a:lnB>
+                  </a:tcPr>
+                </a:tc>
+                <a:tc>
+                  <a:txBody>
+                    <a:bodyPr/>
+                    <a:lstStyle/>
+                    <a:p>
+                      <a:pPr algn="ctr"/>
+                      <a:r>
+                        <a:rPr sz="800">
+                          <a:latin typeface="Segoe UI"/>
+                        </a:rPr>
+                        <a:t>12.5%</a:t>
+                      </a:r>
+                    </a:p>
+                  </a:txBody>
+                  <a:tcPr marL="114300" marR="91425" marT="45700" marB="45700">
+                    <a:solidFill>
+                      <a:srgbClr val="F5F3FF"/>
+                    </a:solidFill>
+                    <a:lnL w="6350" cap="flat" cmpd="sng">
+                      <a:solidFill>
+                        <a:srgbClr val="E5E7EB"/>
+                      </a:solidFill>
+                    </a:lnL>
+                    <a:lnR w="6350" cap="flat" cmpd="sng">
+                      <a:solidFill>
+                        <a:srgbClr val="E5E7EB"/>
+                      </a:solidFill>
+                    </a:lnR>
+                    <a:lnT w="6350" cap="flat" cmpd="sng">
+                      <a:solidFill>
+                        <a:srgbClr val="E5E7EB"/>
+                      </a:solidFill>
+                    </a:lnT>
+                    <a:lnB w="6350" cap="flat" cmpd="sng">
+                      <a:solidFill>
+                        <a:srgbClr val="E5E7EB"/>
+                      </a:solidFill>
+                    </a:lnB>
+                  </a:tcPr>
+                </a:tc>
+                <a:tc>
+                  <a:txBody>
+                    <a:bodyPr/>
+                    <a:lstStyle/>
+                    <a:p>
+                      <a:pPr algn="ctr"/>
+                      <a:r>
+                        <a:rPr sz="800">
+                          <a:solidFill>
+                            <a:srgbClr val="DC2626"/>
+                          </a:solidFill>
+                          <a:latin typeface="Segoe UI"/>
+                        </a:rPr>
+                        <a:t>11.9%</a:t>
                       </a:r>
                     </a:p>
                   </a:txBody>
@@ -4702,89 +4785,6 @@
                       <a:pPr algn="ctr"/>
                       <a:r>
                         <a:rPr sz="800">
-                          <a:solidFill>
-                            <a:srgbClr val="DC2626"/>
-                          </a:solidFill>
-                          <a:latin typeface="Segoe UI"/>
-                        </a:rPr>
-                        <a:t>12.8%</a:t>
-                      </a:r>
-                    </a:p>
-                  </a:txBody>
-                  <a:tcPr marL="114300" marR="91425" marT="45700" marB="45700">
-                    <a:solidFill>
-                      <a:srgbClr val="F5F3FF"/>
-                    </a:solidFill>
-                    <a:lnL w="6350" cap="flat" cmpd="sng">
-                      <a:solidFill>
-                        <a:srgbClr val="E5E7EB"/>
-                      </a:solidFill>
-                    </a:lnL>
-                    <a:lnR w="6350" cap="flat" cmpd="sng">
-                      <a:solidFill>
-                        <a:srgbClr val="E5E7EB"/>
-                      </a:solidFill>
-                    </a:lnR>
-                    <a:lnT w="6350" cap="flat" cmpd="sng">
-                      <a:solidFill>
-                        <a:srgbClr val="E5E7EB"/>
-                      </a:solidFill>
-                    </a:lnT>
-                    <a:lnB w="6350" cap="flat" cmpd="sng">
-                      <a:solidFill>
-                        <a:srgbClr val="E5E7EB"/>
-                      </a:solidFill>
-                    </a:lnB>
-                  </a:tcPr>
-                </a:tc>
-                <a:tc>
-                  <a:txBody>
-                    <a:bodyPr/>
-                    <a:lstStyle/>
-                    <a:p>
-                      <a:pPr algn="ctr"/>
-                      <a:r>
-                        <a:rPr sz="800">
-                          <a:latin typeface="Segoe UI"/>
-                        </a:rPr>
-                        <a:t>14.0%</a:t>
-                      </a:r>
-                    </a:p>
-                  </a:txBody>
-                  <a:tcPr marL="114300" marR="91425" marT="45700" marB="45700">
-                    <a:solidFill>
-                      <a:srgbClr val="F5F3FF"/>
-                    </a:solidFill>
-                    <a:lnL w="6350" cap="flat" cmpd="sng">
-                      <a:solidFill>
-                        <a:srgbClr val="E5E7EB"/>
-                      </a:solidFill>
-                    </a:lnL>
-                    <a:lnR w="6350" cap="flat" cmpd="sng">
-                      <a:solidFill>
-                        <a:srgbClr val="E5E7EB"/>
-                      </a:solidFill>
-                    </a:lnR>
-                    <a:lnT w="6350" cap="flat" cmpd="sng">
-                      <a:solidFill>
-                        <a:srgbClr val="E5E7EB"/>
-                      </a:solidFill>
-                    </a:lnT>
-                    <a:lnB w="6350" cap="flat" cmpd="sng">
-                      <a:solidFill>
-                        <a:srgbClr val="E5E7EB"/>
-                      </a:solidFill>
-                    </a:lnB>
-                  </a:tcPr>
-                </a:tc>
-                <a:tc>
-                  <a:txBody>
-                    <a:bodyPr/>
-                    <a:lstStyle/>
-                    <a:p>
-                      <a:pPr algn="ctr"/>
-                      <a:r>
-                        <a:rPr sz="800">
                           <a:latin typeface="Segoe UI"/>
                         </a:rPr>
                         <a:t/>
@@ -4906,7 +4906,7 @@
                           </a:solidFill>
                           <a:latin typeface="Segoe UI"/>
                         </a:rPr>
-                        <a:t>12</a:t>
+                        <a:t>13</a:t>
                       </a:r>
                     </a:p>
                   </a:txBody>
@@ -4943,7 +4943,7 @@
                         <a:rPr sz="800">
                           <a:latin typeface="Segoe UI"/>
                         </a:rPr>
-                        <a:t>19</a:t>
+                        <a:t>18</a:t>
                       </a:r>
                     </a:p>
                   </a:txBody>
@@ -5020,7 +5020,7 @@
                         <a:rPr sz="800">
                           <a:latin typeface="Segoe UI"/>
                         </a:rPr>
-                        <a:t>18</a:t>
+                        <a:t>17</a:t>
                       </a:r>
                     </a:p>
                   </a:txBody>

--- a/generated/Tier 1 Broker Scorecards/Call Patty Insurance Services_Broker_Scorecard.pptx
+++ b/generated/Tier 1 Broker Scorecards/Call Patty Insurance Services_Broker_Scorecard.pptx
@@ -3394,7 +3394,7 @@
                         <a:rPr sz="900">
                           <a:latin typeface="Segoe UI"/>
                         </a:rPr>
-                        <a:t>Tier 1  |  7.85% / 15.00%</a:t>
+                        <a:t>Tier 1  |  7.99% / 15.00%</a:t>
                       </a:r>
                     </a:p>
                   </a:txBody>
@@ -3690,7 +3690,7 @@
                         <a:rPr sz="900">
                           <a:latin typeface="Segoe UI"/>
                         </a:rPr>
-                        <a:t>Fleet Bound Premium: $341,743.64</a:t>
+                        <a:t>Fleet Bound Premium: $328,925.75</a:t>
                       </a:r>
                     </a:p>
                   </a:txBody>
@@ -3727,7 +3727,7 @@
                         <a:rPr sz="900">
                           <a:latin typeface="Segoe UI"/>
                         </a:rPr>
-                        <a:t>Fleet Book %: 46.3%</a:t>
+                        <a:t>Fleet Book %: 44.6%</a:t>
                       </a:r>
                     </a:p>
                   </a:txBody>
@@ -3766,7 +3766,7 @@
                         <a:rPr sz="900">
                           <a:latin typeface="Segoe UI"/>
                         </a:rPr>
-                        <a:t>Non-Fleet Subs: 420  |  Binds: 28</a:t>
+                        <a:t>Non-Fleet Subs: 425  |  Binds: 29</a:t>
                       </a:r>
                     </a:p>
                   </a:txBody>
@@ -3803,7 +3803,7 @@
                         <a:rPr sz="900">
                           <a:latin typeface="Segoe UI"/>
                         </a:rPr>
-                        <a:t>Non-Fleet Bound Premium: $396,092.01</a:t>
+                        <a:t>Non-Fleet Bound Premium: $408,909.90</a:t>
                       </a:r>
                     </a:p>
                   </a:txBody>
@@ -3840,7 +3840,7 @@
                         <a:rPr sz="900">
                           <a:latin typeface="Segoe UI"/>
                         </a:rPr>
-                        <a:t>Non-Fleet Book %: 53.7%</a:t>
+                        <a:t>Non-Fleet Book %: 55.4%</a:t>
                       </a:r>
                     </a:p>
                   </a:txBody>
@@ -4428,7 +4428,7 @@
                           </a:solidFill>
                           <a:latin typeface="Segoe UI"/>
                         </a:rPr>
-                        <a:t>84</a:t>
+                        <a:t>89</a:t>
                       </a:r>
                     </a:p>
                   </a:txBody>
@@ -4664,7 +4664,7 @@
                         <a:rPr sz="800">
                           <a:latin typeface="Segoe UI"/>
                         </a:rPr>
-                        <a:t>12.5%</a:t>
+                        <a:t>13.2%</a:t>
                       </a:r>
                     </a:p>
                   </a:txBody>
@@ -4707,7 +4707,7 @@
                           </a:solidFill>
                           <a:latin typeface="Segoe UI"/>
                         </a:rPr>
-                        <a:t>11.9%</a:t>
+                        <a:t>12.4%</a:t>
                       </a:r>
                     </a:p>
                   </a:txBody>
@@ -4943,7 +4943,7 @@
                         <a:rPr sz="800">
                           <a:latin typeface="Segoe UI"/>
                         </a:rPr>
-                        <a:t>18</a:t>
+                        <a:t>19</a:t>
                       </a:r>
                     </a:p>
                   </a:txBody>
@@ -4983,7 +4983,7 @@
                           </a:solidFill>
                           <a:latin typeface="Segoe UI"/>
                         </a:rPr>
-                        <a:t>10</a:t>
+                        <a:t>11</a:t>
                       </a:r>
                     </a:p>
                   </a:txBody>
@@ -5345,7 +5345,7 @@
                           </a:solidFill>
                           <a:latin typeface="Segoe UI"/>
                         </a:rPr>
-                        <a:t>$33.1K</a:t>
+                        <a:t>$75.1K</a:t>
                       </a:r>
                     </a:p>
                   </a:txBody>

--- a/generated/Tier 1 Broker Scorecards/Call Patty Insurance Services_Broker_Scorecard.pptx
+++ b/generated/Tier 1 Broker Scorecards/Call Patty Insurance Services_Broker_Scorecard.pptx
@@ -3357,7 +3357,7 @@
                         <a:rPr sz="800">
                           <a:latin typeface="Segoe UI"/>
                         </a:rPr>
-                        <a:t>$2,749,089.87 / $2,442,359.57 / $737,835.65</a:t>
+                        <a:t>$2,749,089.87 / $2,467,417.61 / $762,893.69</a:t>
                       </a:r>
                     </a:p>
                   </a:txBody>
@@ -3394,7 +3394,7 @@
                         <a:rPr sz="900">
                           <a:latin typeface="Segoe UI"/>
                         </a:rPr>
-                        <a:t>Tier 1  |  7.99% / 15.00%</a:t>
+                        <a:t>Tier 1  |  8.16% / 15.00%</a:t>
                       </a:r>
                     </a:p>
                   </a:txBody>
@@ -3431,7 +3431,7 @@
                         <a:rPr sz="900">
                           <a:latin typeface="Segoe UI"/>
                         </a:rPr>
-                        <a:t>$3,848,725.82  (19.2% achieved)</a:t>
+                        <a:t>$3,848,725.82  (19.8% achieved)</a:t>
                       </a:r>
                     </a:p>
                   </a:txBody>
@@ -3690,7 +3690,7 @@
                         <a:rPr sz="900">
                           <a:latin typeface="Segoe UI"/>
                         </a:rPr>
-                        <a:t>Fleet Bound Premium: $328,925.75</a:t>
+                        <a:t>Fleet Bound Premium: $352,890.49</a:t>
                       </a:r>
                     </a:p>
                   </a:txBody>
@@ -3727,7 +3727,7 @@
                         <a:rPr sz="900">
                           <a:latin typeface="Segoe UI"/>
                         </a:rPr>
-                        <a:t>Fleet Book %: 44.6%</a:t>
+                        <a:t>Fleet Book %: 46.3%</a:t>
                       </a:r>
                     </a:p>
                   </a:txBody>
@@ -3766,7 +3766,7 @@
                         <a:rPr sz="900">
                           <a:latin typeface="Segoe UI"/>
                         </a:rPr>
-                        <a:t>Non-Fleet Subs: 425  |  Binds: 29</a:t>
+                        <a:t>Non-Fleet Subs: 428  |  Binds: 30</a:t>
                       </a:r>
                     </a:p>
                   </a:txBody>
@@ -3803,7 +3803,7 @@
                         <a:rPr sz="900">
                           <a:latin typeface="Segoe UI"/>
                         </a:rPr>
-                        <a:t>Non-Fleet Bound Premium: $408,909.90</a:t>
+                        <a:t>Non-Fleet Bound Premium: $410,003.20</a:t>
                       </a:r>
                     </a:p>
                   </a:txBody>
@@ -3840,7 +3840,7 @@
                         <a:rPr sz="900">
                           <a:latin typeface="Segoe UI"/>
                         </a:rPr>
-                        <a:t>Non-Fleet Book %: 55.4%</a:t>
+                        <a:t>Non-Fleet Book %: 53.7%</a:t>
                       </a:r>
                     </a:p>
                   </a:txBody>
@@ -4428,7 +4428,7 @@
                           </a:solidFill>
                           <a:latin typeface="Segoe UI"/>
                         </a:rPr>
-                        <a:t>89</a:t>
+                        <a:t>92</a:t>
                       </a:r>
                     </a:p>
                   </a:txBody>
@@ -4581,7 +4581,7 @@
                         <a:rPr sz="800">
                           <a:latin typeface="Segoe UI"/>
                         </a:rPr>
-                        <a:t>12.8%</a:t>
+                        <a:t>13.4%</a:t>
                       </a:r>
                     </a:p>
                   </a:txBody>
@@ -4703,11 +4703,11 @@
                       <a:r>
                         <a:rPr sz="800">
                           <a:solidFill>
-                            <a:srgbClr val="DC2626"/>
+                            <a:srgbClr val="059669"/>
                           </a:solidFill>
                           <a:latin typeface="Segoe UI"/>
                         </a:rPr>
-                        <a:t>12.4%</a:t>
+                        <a:t>14.1%</a:t>
                       </a:r>
                     </a:p>
                   </a:txBody>
@@ -4866,7 +4866,7 @@
                         <a:rPr sz="800">
                           <a:latin typeface="Segoe UI"/>
                         </a:rPr>
-                        <a:t>19</a:t>
+                        <a:t>20</a:t>
                       </a:r>
                     </a:p>
                   </a:txBody>
@@ -4983,7 +4983,7 @@
                           </a:solidFill>
                           <a:latin typeface="Segoe UI"/>
                         </a:rPr>
-                        <a:t>11</a:t>
+                        <a:t>13</a:t>
                       </a:r>
                     </a:p>
                   </a:txBody>
@@ -5262,7 +5262,7 @@
                           </a:solidFill>
                           <a:latin typeface="Segoe UI"/>
                         </a:rPr>
-                        <a:t>$142.3K</a:t>
+                        <a:t>$167.4K</a:t>
                       </a:r>
                     </a:p>
                   </a:txBody>

--- a/generated/Tier 1 Broker Scorecards/Call Patty Insurance Services_Broker_Scorecard.pptx
+++ b/generated/Tier 1 Broker Scorecards/Call Patty Insurance Services_Broker_Scorecard.pptx
@@ -4581,7 +4581,7 @@
                         <a:rPr sz="800">
                           <a:latin typeface="Segoe UI"/>
                         </a:rPr>
-                        <a:t>13.4%</a:t>
+                        <a:t>12.8%</a:t>
                       </a:r>
                     </a:p>
                   </a:txBody>
@@ -4866,7 +4866,7 @@
                         <a:rPr sz="800">
                           <a:latin typeface="Segoe UI"/>
                         </a:rPr>
-                        <a:t>20</a:t>
+                        <a:t>19</a:t>
                       </a:r>
                     </a:p>
                   </a:txBody>

--- a/generated/Tier 1 Broker Scorecards/Call Patty Insurance Services_Broker_Scorecard.pptx
+++ b/generated/Tier 1 Broker Scorecards/Call Patty Insurance Services_Broker_Scorecard.pptx
@@ -3357,7 +3357,7 @@
                         <a:rPr sz="800">
                           <a:latin typeface="Segoe UI"/>
                         </a:rPr>
-                        <a:t>$2,749,089.87 / $2,467,417.61 / $762,893.69</a:t>
+                        <a:t>$2,749,089.87 / $2,302,309.03 / $837,955.10</a:t>
                       </a:r>
                     </a:p>
                   </a:txBody>
@@ -3431,7 +3431,7 @@
                         <a:rPr sz="900">
                           <a:latin typeface="Segoe UI"/>
                         </a:rPr>
-                        <a:t>$3,848,725.82  (19.8% achieved)</a:t>
+                        <a:t>$3,848,725.82  (21.8% achieved)</a:t>
                       </a:r>
                     </a:p>
                   </a:txBody>
@@ -3690,7 +3690,7 @@
                         <a:rPr sz="900">
                           <a:latin typeface="Segoe UI"/>
                         </a:rPr>
-                        <a:t>Fleet Bound Premium: $352,890.49</a:t>
+                        <a:t>Fleet Bound Premium: $387,611.52</a:t>
                       </a:r>
                     </a:p>
                   </a:txBody>
@@ -3803,7 +3803,7 @@
                         <a:rPr sz="900">
                           <a:latin typeface="Segoe UI"/>
                         </a:rPr>
-                        <a:t>Non-Fleet Bound Premium: $410,003.20</a:t>
+                        <a:t>Non-Fleet Bound Premium: $450,343.58</a:t>
                       </a:r>
                     </a:p>
                   </a:txBody>
@@ -4581,7 +4581,7 @@
                         <a:rPr sz="800">
                           <a:latin typeface="Segoe UI"/>
                         </a:rPr>
-                        <a:t>12.8%</a:t>
+                        <a:t>13.4%</a:t>
                       </a:r>
                     </a:p>
                   </a:txBody>
@@ -4747,7 +4747,7 @@
                         <a:rPr sz="800">
                           <a:latin typeface="Segoe UI"/>
                         </a:rPr>
-                        <a:t>13.2%</a:t>
+                        <a:t>12.4%</a:t>
                       </a:r>
                     </a:p>
                   </a:txBody>
@@ -4866,7 +4866,7 @@
                         <a:rPr sz="800">
                           <a:latin typeface="Segoe UI"/>
                         </a:rPr>
-                        <a:t>19</a:t>
+                        <a:t>20</a:t>
                       </a:r>
                     </a:p>
                   </a:txBody>
@@ -5020,7 +5020,7 @@
                         <a:rPr sz="800">
                           <a:latin typeface="Segoe UI"/>
                         </a:rPr>
-                        <a:t>17</a:t>
+                        <a:t>16</a:t>
                       </a:r>
                     </a:p>
                   </a:txBody>
